--- a/materials/OS-M3/OS-M3-S8-Simulations/OS-M3-S8-Simulations-slides.pptx
+++ b/materials/OS-M3/OS-M3-S8-Simulations/OS-M3-S8-Simulations-slides.pptx
@@ -7585,7 +7585,7 @@
             </a:pPr>
             <a:r>
               <a:rPr/>
-              <a:t>31/08/2026</a:t>
+              <a:t>07/09/2026</a:t>
             </a:r>
           </a:p>
         </p:txBody>

--- a/materials/OS-M3/OS-M3-S8-Simulations/OS-M3-S8-Simulations-slides.pptx
+++ b/materials/OS-M3/OS-M3-S8-Simulations/OS-M3-S8-Simulations-slides.pptx
@@ -7585,7 +7585,7 @@
             </a:pPr>
             <a:r>
               <a:rPr/>
-              <a:t>07/09/2026</a:t>
+              <a:t>14/09/2026</a:t>
             </a:r>
           </a:p>
         </p:txBody>

--- a/materials/OS-M3/OS-M3-S8-Simulations/OS-M3-S8-Simulations-slides.pptx
+++ b/materials/OS-M3/OS-M3-S8-Simulations/OS-M3-S8-Simulations-slides.pptx
@@ -7585,7 +7585,7 @@
             </a:pPr>
             <a:r>
               <a:rPr/>
-              <a:t>14/09/2026</a:t>
+              <a:t>21/09/2026</a:t>
             </a:r>
           </a:p>
         </p:txBody>

--- a/materials/OS-M3/OS-M3-S8-Simulations/OS-M3-S8-Simulations-slides.pptx
+++ b/materials/OS-M3/OS-M3-S8-Simulations/OS-M3-S8-Simulations-slides.pptx
@@ -7585,7 +7585,7 @@
             </a:pPr>
             <a:r>
               <a:rPr/>
-              <a:t>21/09/2026</a:t>
+              <a:t>24/09/2026</a:t>
             </a:r>
           </a:p>
         </p:txBody>

--- a/materials/OS-M3/OS-M3-S8-Simulations/OS-M3-S8-Simulations-slides.pptx
+++ b/materials/OS-M3/OS-M3-S8-Simulations/OS-M3-S8-Simulations-slides.pptx
@@ -7585,7 +7585,7 @@
             </a:pPr>
             <a:r>
               <a:rPr/>
-              <a:t>24/09/2026</a:t>
+              <a:t>28/09/2026</a:t>
             </a:r>
           </a:p>
         </p:txBody>
